--- a/願你榮耀國度降臨.pptx
+++ b/願你榮耀國度降臨.pptx
@@ -171,10 +171,9 @@
           <a:lstStyle/>
           <a:p>
             <a:r>
-              <a:rPr lang="zh-TW" altLang="en-US" smtClean="0"/>
+              <a:rPr lang="zh-TW" altLang="en-US"/>
               <a:t>按一下以編輯母片標題樣式</a:t>
             </a:r>
-            <a:endParaRPr lang="zh-TW" altLang="en-US"/>
           </a:p>
         </p:txBody>
       </p:sp>
@@ -290,10 +289,9 @@
           </a:lstStyle>
           <a:p>
             <a:r>
-              <a:rPr lang="zh-TW" altLang="en-US" smtClean="0"/>
+              <a:rPr lang="zh-TW" altLang="en-US"/>
               <a:t>按一下以編輯母片副標題樣式</a:t>
             </a:r>
-            <a:endParaRPr lang="zh-TW" altLang="en-US"/>
           </a:p>
         </p:txBody>
       </p:sp>
@@ -314,7 +312,7 @@
           <a:p>
             <a:fld id="{2CCF1B83-BCEE-41D4-A1FA-45F394F0455A}" type="datetimeFigureOut">
               <a:rPr lang="zh-TW" altLang="en-US" smtClean="0"/>
-              <a:t>2021/11/12</a:t>
+              <a:t>2024/4/13</a:t>
             </a:fld>
             <a:endParaRPr lang="zh-TW" altLang="en-US"/>
           </a:p>
@@ -403,10 +401,9 @@
           <a:lstStyle/>
           <a:p>
             <a:r>
-              <a:rPr lang="zh-TW" altLang="en-US" smtClean="0"/>
+              <a:rPr lang="zh-TW" altLang="en-US"/>
               <a:t>按一下以編輯母片標題樣式</a:t>
             </a:r>
-            <a:endParaRPr lang="zh-TW" altLang="en-US"/>
           </a:p>
         </p:txBody>
       </p:sp>
@@ -427,38 +424,37 @@
           <a:p>
             <a:pPr lvl="0"/>
             <a:r>
-              <a:rPr lang="zh-TW" altLang="en-US" smtClean="0"/>
+              <a:rPr lang="zh-TW" altLang="en-US"/>
               <a:t>按一下以編輯母片文字樣式</a:t>
             </a:r>
           </a:p>
           <a:p>
             <a:pPr lvl="1"/>
             <a:r>
-              <a:rPr lang="zh-TW" altLang="en-US" smtClean="0"/>
+              <a:rPr lang="zh-TW" altLang="en-US"/>
               <a:t>第二層</a:t>
             </a:r>
           </a:p>
           <a:p>
             <a:pPr lvl="2"/>
             <a:r>
-              <a:rPr lang="zh-TW" altLang="en-US" smtClean="0"/>
+              <a:rPr lang="zh-TW" altLang="en-US"/>
               <a:t>第三層</a:t>
             </a:r>
           </a:p>
           <a:p>
             <a:pPr lvl="3"/>
             <a:r>
-              <a:rPr lang="zh-TW" altLang="en-US" smtClean="0"/>
+              <a:rPr lang="zh-TW" altLang="en-US"/>
               <a:t>第四層</a:t>
             </a:r>
           </a:p>
           <a:p>
             <a:pPr lvl="4"/>
             <a:r>
-              <a:rPr lang="zh-TW" altLang="en-US" smtClean="0"/>
+              <a:rPr lang="zh-TW" altLang="en-US"/>
               <a:t>第五層</a:t>
             </a:r>
-            <a:endParaRPr lang="zh-TW" altLang="en-US"/>
           </a:p>
         </p:txBody>
       </p:sp>
@@ -479,7 +475,7 @@
           <a:p>
             <a:fld id="{2CCF1B83-BCEE-41D4-A1FA-45F394F0455A}" type="datetimeFigureOut">
               <a:rPr lang="zh-TW" altLang="en-US" smtClean="0"/>
-              <a:t>2021/11/12</a:t>
+              <a:t>2024/4/13</a:t>
             </a:fld>
             <a:endParaRPr lang="zh-TW" altLang="en-US"/>
           </a:p>
@@ -573,10 +569,9 @@
           <a:lstStyle/>
           <a:p>
             <a:r>
-              <a:rPr lang="zh-TW" altLang="en-US" smtClean="0"/>
+              <a:rPr lang="zh-TW" altLang="en-US"/>
               <a:t>按一下以編輯母片標題樣式</a:t>
             </a:r>
-            <a:endParaRPr lang="zh-TW" altLang="en-US"/>
           </a:p>
         </p:txBody>
       </p:sp>
@@ -602,38 +597,37 @@
           <a:p>
             <a:pPr lvl="0"/>
             <a:r>
-              <a:rPr lang="zh-TW" altLang="en-US" smtClean="0"/>
+              <a:rPr lang="zh-TW" altLang="en-US"/>
               <a:t>按一下以編輯母片文字樣式</a:t>
             </a:r>
           </a:p>
           <a:p>
             <a:pPr lvl="1"/>
             <a:r>
-              <a:rPr lang="zh-TW" altLang="en-US" smtClean="0"/>
+              <a:rPr lang="zh-TW" altLang="en-US"/>
               <a:t>第二層</a:t>
             </a:r>
           </a:p>
           <a:p>
             <a:pPr lvl="2"/>
             <a:r>
-              <a:rPr lang="zh-TW" altLang="en-US" smtClean="0"/>
+              <a:rPr lang="zh-TW" altLang="en-US"/>
               <a:t>第三層</a:t>
             </a:r>
           </a:p>
           <a:p>
             <a:pPr lvl="3"/>
             <a:r>
-              <a:rPr lang="zh-TW" altLang="en-US" smtClean="0"/>
+              <a:rPr lang="zh-TW" altLang="en-US"/>
               <a:t>第四層</a:t>
             </a:r>
           </a:p>
           <a:p>
             <a:pPr lvl="4"/>
             <a:r>
-              <a:rPr lang="zh-TW" altLang="en-US" smtClean="0"/>
+              <a:rPr lang="zh-TW" altLang="en-US"/>
               <a:t>第五層</a:t>
             </a:r>
-            <a:endParaRPr lang="zh-TW" altLang="en-US"/>
           </a:p>
         </p:txBody>
       </p:sp>
@@ -654,7 +648,7 @@
           <a:p>
             <a:fld id="{2CCF1B83-BCEE-41D4-A1FA-45F394F0455A}" type="datetimeFigureOut">
               <a:rPr lang="zh-TW" altLang="en-US" smtClean="0"/>
-              <a:t>2021/11/12</a:t>
+              <a:t>2024/4/13</a:t>
             </a:fld>
             <a:endParaRPr lang="zh-TW" altLang="en-US"/>
           </a:p>
@@ -743,10 +737,9 @@
           <a:lstStyle/>
           <a:p>
             <a:r>
-              <a:rPr lang="zh-TW" altLang="en-US" smtClean="0"/>
+              <a:rPr lang="zh-TW" altLang="en-US"/>
               <a:t>按一下以編輯母片標題樣式</a:t>
             </a:r>
-            <a:endParaRPr lang="zh-TW" altLang="en-US"/>
           </a:p>
         </p:txBody>
       </p:sp>
@@ -767,38 +760,37 @@
           <a:p>
             <a:pPr lvl="0"/>
             <a:r>
-              <a:rPr lang="zh-TW" altLang="en-US" smtClean="0"/>
+              <a:rPr lang="zh-TW" altLang="en-US"/>
               <a:t>按一下以編輯母片文字樣式</a:t>
             </a:r>
           </a:p>
           <a:p>
             <a:pPr lvl="1"/>
             <a:r>
-              <a:rPr lang="zh-TW" altLang="en-US" smtClean="0"/>
+              <a:rPr lang="zh-TW" altLang="en-US"/>
               <a:t>第二層</a:t>
             </a:r>
           </a:p>
           <a:p>
             <a:pPr lvl="2"/>
             <a:r>
-              <a:rPr lang="zh-TW" altLang="en-US" smtClean="0"/>
+              <a:rPr lang="zh-TW" altLang="en-US"/>
               <a:t>第三層</a:t>
             </a:r>
           </a:p>
           <a:p>
             <a:pPr lvl="3"/>
             <a:r>
-              <a:rPr lang="zh-TW" altLang="en-US" smtClean="0"/>
+              <a:rPr lang="zh-TW" altLang="en-US"/>
               <a:t>第四層</a:t>
             </a:r>
           </a:p>
           <a:p>
             <a:pPr lvl="4"/>
             <a:r>
-              <a:rPr lang="zh-TW" altLang="en-US" smtClean="0"/>
+              <a:rPr lang="zh-TW" altLang="en-US"/>
               <a:t>第五層</a:t>
             </a:r>
-            <a:endParaRPr lang="zh-TW" altLang="en-US"/>
           </a:p>
         </p:txBody>
       </p:sp>
@@ -819,7 +811,7 @@
           <a:p>
             <a:fld id="{2CCF1B83-BCEE-41D4-A1FA-45F394F0455A}" type="datetimeFigureOut">
               <a:rPr lang="zh-TW" altLang="en-US" smtClean="0"/>
-              <a:t>2021/11/12</a:t>
+              <a:t>2024/4/13</a:t>
             </a:fld>
             <a:endParaRPr lang="zh-TW" altLang="en-US"/>
           </a:p>
@@ -917,10 +909,9 @@
           </a:lstStyle>
           <a:p>
             <a:r>
-              <a:rPr lang="zh-TW" altLang="en-US" smtClean="0"/>
+              <a:rPr lang="zh-TW" altLang="en-US"/>
               <a:t>按一下以編輯母片標題樣式</a:t>
             </a:r>
-            <a:endParaRPr lang="zh-TW" altLang="en-US"/>
           </a:p>
         </p:txBody>
       </p:sp>
@@ -1037,7 +1028,7 @@
           <a:p>
             <a:pPr lvl="0"/>
             <a:r>
-              <a:rPr lang="zh-TW" altLang="en-US" smtClean="0"/>
+              <a:rPr lang="zh-TW" altLang="en-US"/>
               <a:t>按一下以編輯母片文字樣式</a:t>
             </a:r>
           </a:p>
@@ -1060,7 +1051,7 @@
           <a:p>
             <a:fld id="{2CCF1B83-BCEE-41D4-A1FA-45F394F0455A}" type="datetimeFigureOut">
               <a:rPr lang="zh-TW" altLang="en-US" smtClean="0"/>
-              <a:t>2021/11/12</a:t>
+              <a:t>2024/4/13</a:t>
             </a:fld>
             <a:endParaRPr lang="zh-TW" altLang="en-US"/>
           </a:p>
@@ -1149,10 +1140,9 @@
           <a:lstStyle/>
           <a:p>
             <a:r>
-              <a:rPr lang="zh-TW" altLang="en-US" smtClean="0"/>
+              <a:rPr lang="zh-TW" altLang="en-US"/>
               <a:t>按一下以編輯母片標題樣式</a:t>
             </a:r>
-            <a:endParaRPr lang="zh-TW" altLang="en-US"/>
           </a:p>
         </p:txBody>
       </p:sp>
@@ -1206,38 +1196,37 @@
           <a:p>
             <a:pPr lvl="0"/>
             <a:r>
-              <a:rPr lang="zh-TW" altLang="en-US" smtClean="0"/>
+              <a:rPr lang="zh-TW" altLang="en-US"/>
               <a:t>按一下以編輯母片文字樣式</a:t>
             </a:r>
           </a:p>
           <a:p>
             <a:pPr lvl="1"/>
             <a:r>
-              <a:rPr lang="zh-TW" altLang="en-US" smtClean="0"/>
+              <a:rPr lang="zh-TW" altLang="en-US"/>
               <a:t>第二層</a:t>
             </a:r>
           </a:p>
           <a:p>
             <a:pPr lvl="2"/>
             <a:r>
-              <a:rPr lang="zh-TW" altLang="en-US" smtClean="0"/>
+              <a:rPr lang="zh-TW" altLang="en-US"/>
               <a:t>第三層</a:t>
             </a:r>
           </a:p>
           <a:p>
             <a:pPr lvl="3"/>
             <a:r>
-              <a:rPr lang="zh-TW" altLang="en-US" smtClean="0"/>
+              <a:rPr lang="zh-TW" altLang="en-US"/>
               <a:t>第四層</a:t>
             </a:r>
           </a:p>
           <a:p>
             <a:pPr lvl="4"/>
             <a:r>
-              <a:rPr lang="zh-TW" altLang="en-US" smtClean="0"/>
+              <a:rPr lang="zh-TW" altLang="en-US"/>
               <a:t>第五層</a:t>
             </a:r>
-            <a:endParaRPr lang="zh-TW" altLang="en-US"/>
           </a:p>
         </p:txBody>
       </p:sp>
@@ -1291,38 +1280,37 @@
           <a:p>
             <a:pPr lvl="0"/>
             <a:r>
-              <a:rPr lang="zh-TW" altLang="en-US" smtClean="0"/>
+              <a:rPr lang="zh-TW" altLang="en-US"/>
               <a:t>按一下以編輯母片文字樣式</a:t>
             </a:r>
           </a:p>
           <a:p>
             <a:pPr lvl="1"/>
             <a:r>
-              <a:rPr lang="zh-TW" altLang="en-US" smtClean="0"/>
+              <a:rPr lang="zh-TW" altLang="en-US"/>
               <a:t>第二層</a:t>
             </a:r>
           </a:p>
           <a:p>
             <a:pPr lvl="2"/>
             <a:r>
-              <a:rPr lang="zh-TW" altLang="en-US" smtClean="0"/>
+              <a:rPr lang="zh-TW" altLang="en-US"/>
               <a:t>第三層</a:t>
             </a:r>
           </a:p>
           <a:p>
             <a:pPr lvl="3"/>
             <a:r>
-              <a:rPr lang="zh-TW" altLang="en-US" smtClean="0"/>
+              <a:rPr lang="zh-TW" altLang="en-US"/>
               <a:t>第四層</a:t>
             </a:r>
           </a:p>
           <a:p>
             <a:pPr lvl="4"/>
             <a:r>
-              <a:rPr lang="zh-TW" altLang="en-US" smtClean="0"/>
+              <a:rPr lang="zh-TW" altLang="en-US"/>
               <a:t>第五層</a:t>
             </a:r>
-            <a:endParaRPr lang="zh-TW" altLang="en-US"/>
           </a:p>
         </p:txBody>
       </p:sp>
@@ -1343,7 +1331,7 @@
           <a:p>
             <a:fld id="{2CCF1B83-BCEE-41D4-A1FA-45F394F0455A}" type="datetimeFigureOut">
               <a:rPr lang="zh-TW" altLang="en-US" smtClean="0"/>
-              <a:t>2021/11/12</a:t>
+              <a:t>2024/4/13</a:t>
             </a:fld>
             <a:endParaRPr lang="zh-TW" altLang="en-US"/>
           </a:p>
@@ -1436,10 +1424,9 @@
           </a:lstStyle>
           <a:p>
             <a:r>
-              <a:rPr lang="zh-TW" altLang="en-US" smtClean="0"/>
+              <a:rPr lang="zh-TW" altLang="en-US"/>
               <a:t>按一下以編輯母片標題樣式</a:t>
             </a:r>
-            <a:endParaRPr lang="zh-TW" altLang="en-US"/>
           </a:p>
         </p:txBody>
       </p:sp>
@@ -1502,7 +1489,7 @@
           <a:p>
             <a:pPr lvl="0"/>
             <a:r>
-              <a:rPr lang="zh-TW" altLang="en-US" smtClean="0"/>
+              <a:rPr lang="zh-TW" altLang="en-US"/>
               <a:t>按一下以編輯母片文字樣式</a:t>
             </a:r>
           </a:p>
@@ -1558,38 +1545,37 @@
           <a:p>
             <a:pPr lvl="0"/>
             <a:r>
-              <a:rPr lang="zh-TW" altLang="en-US" smtClean="0"/>
+              <a:rPr lang="zh-TW" altLang="en-US"/>
               <a:t>按一下以編輯母片文字樣式</a:t>
             </a:r>
           </a:p>
           <a:p>
             <a:pPr lvl="1"/>
             <a:r>
-              <a:rPr lang="zh-TW" altLang="en-US" smtClean="0"/>
+              <a:rPr lang="zh-TW" altLang="en-US"/>
               <a:t>第二層</a:t>
             </a:r>
           </a:p>
           <a:p>
             <a:pPr lvl="2"/>
             <a:r>
-              <a:rPr lang="zh-TW" altLang="en-US" smtClean="0"/>
+              <a:rPr lang="zh-TW" altLang="en-US"/>
               <a:t>第三層</a:t>
             </a:r>
           </a:p>
           <a:p>
             <a:pPr lvl="3"/>
             <a:r>
-              <a:rPr lang="zh-TW" altLang="en-US" smtClean="0"/>
+              <a:rPr lang="zh-TW" altLang="en-US"/>
               <a:t>第四層</a:t>
             </a:r>
           </a:p>
           <a:p>
             <a:pPr lvl="4"/>
             <a:r>
-              <a:rPr lang="zh-TW" altLang="en-US" smtClean="0"/>
+              <a:rPr lang="zh-TW" altLang="en-US"/>
               <a:t>第五層</a:t>
             </a:r>
-            <a:endParaRPr lang="zh-TW" altLang="en-US"/>
           </a:p>
         </p:txBody>
       </p:sp>
@@ -1652,7 +1638,7 @@
           <a:p>
             <a:pPr lvl="0"/>
             <a:r>
-              <a:rPr lang="zh-TW" altLang="en-US" smtClean="0"/>
+              <a:rPr lang="zh-TW" altLang="en-US"/>
               <a:t>按一下以編輯母片文字樣式</a:t>
             </a:r>
           </a:p>
@@ -1708,38 +1694,37 @@
           <a:p>
             <a:pPr lvl="0"/>
             <a:r>
-              <a:rPr lang="zh-TW" altLang="en-US" smtClean="0"/>
+              <a:rPr lang="zh-TW" altLang="en-US"/>
               <a:t>按一下以編輯母片文字樣式</a:t>
             </a:r>
           </a:p>
           <a:p>
             <a:pPr lvl="1"/>
             <a:r>
-              <a:rPr lang="zh-TW" altLang="en-US" smtClean="0"/>
+              <a:rPr lang="zh-TW" altLang="en-US"/>
               <a:t>第二層</a:t>
             </a:r>
           </a:p>
           <a:p>
             <a:pPr lvl="2"/>
             <a:r>
-              <a:rPr lang="zh-TW" altLang="en-US" smtClean="0"/>
+              <a:rPr lang="zh-TW" altLang="en-US"/>
               <a:t>第三層</a:t>
             </a:r>
           </a:p>
           <a:p>
             <a:pPr lvl="3"/>
             <a:r>
-              <a:rPr lang="zh-TW" altLang="en-US" smtClean="0"/>
+              <a:rPr lang="zh-TW" altLang="en-US"/>
               <a:t>第四層</a:t>
             </a:r>
           </a:p>
           <a:p>
             <a:pPr lvl="4"/>
             <a:r>
-              <a:rPr lang="zh-TW" altLang="en-US" smtClean="0"/>
+              <a:rPr lang="zh-TW" altLang="en-US"/>
               <a:t>第五層</a:t>
             </a:r>
-            <a:endParaRPr lang="zh-TW" altLang="en-US"/>
           </a:p>
         </p:txBody>
       </p:sp>
@@ -1760,7 +1745,7 @@
           <a:p>
             <a:fld id="{2CCF1B83-BCEE-41D4-A1FA-45F394F0455A}" type="datetimeFigureOut">
               <a:rPr lang="zh-TW" altLang="en-US" smtClean="0"/>
-              <a:t>2021/11/12</a:t>
+              <a:t>2024/4/13</a:t>
             </a:fld>
             <a:endParaRPr lang="zh-TW" altLang="en-US"/>
           </a:p>
@@ -1849,10 +1834,9 @@
           <a:lstStyle/>
           <a:p>
             <a:r>
-              <a:rPr lang="zh-TW" altLang="en-US" smtClean="0"/>
+              <a:rPr lang="zh-TW" altLang="en-US"/>
               <a:t>按一下以編輯母片標題樣式</a:t>
             </a:r>
-            <a:endParaRPr lang="zh-TW" altLang="en-US"/>
           </a:p>
         </p:txBody>
       </p:sp>
@@ -1873,7 +1857,7 @@
           <a:p>
             <a:fld id="{2CCF1B83-BCEE-41D4-A1FA-45F394F0455A}" type="datetimeFigureOut">
               <a:rPr lang="zh-TW" altLang="en-US" smtClean="0"/>
-              <a:t>2021/11/12</a:t>
+              <a:t>2024/4/13</a:t>
             </a:fld>
             <a:endParaRPr lang="zh-TW" altLang="en-US"/>
           </a:p>
@@ -1963,7 +1947,7 @@
           <a:p>
             <a:fld id="{2CCF1B83-BCEE-41D4-A1FA-45F394F0455A}" type="datetimeFigureOut">
               <a:rPr lang="zh-TW" altLang="en-US" smtClean="0"/>
-              <a:t>2021/11/12</a:t>
+              <a:t>2024/4/13</a:t>
             </a:fld>
             <a:endParaRPr lang="zh-TW" altLang="en-US"/>
           </a:p>
@@ -2061,10 +2045,9 @@
           </a:lstStyle>
           <a:p>
             <a:r>
-              <a:rPr lang="zh-TW" altLang="en-US" smtClean="0"/>
+              <a:rPr lang="zh-TW" altLang="en-US"/>
               <a:t>按一下以編輯母片標題樣式</a:t>
             </a:r>
-            <a:endParaRPr lang="zh-TW" altLang="en-US"/>
           </a:p>
         </p:txBody>
       </p:sp>
@@ -2118,38 +2101,37 @@
           <a:p>
             <a:pPr lvl="0"/>
             <a:r>
-              <a:rPr lang="zh-TW" altLang="en-US" smtClean="0"/>
+              <a:rPr lang="zh-TW" altLang="en-US"/>
               <a:t>按一下以編輯母片文字樣式</a:t>
             </a:r>
           </a:p>
           <a:p>
             <a:pPr lvl="1"/>
             <a:r>
-              <a:rPr lang="zh-TW" altLang="en-US" smtClean="0"/>
+              <a:rPr lang="zh-TW" altLang="en-US"/>
               <a:t>第二層</a:t>
             </a:r>
           </a:p>
           <a:p>
             <a:pPr lvl="2"/>
             <a:r>
-              <a:rPr lang="zh-TW" altLang="en-US" smtClean="0"/>
+              <a:rPr lang="zh-TW" altLang="en-US"/>
               <a:t>第三層</a:t>
             </a:r>
           </a:p>
           <a:p>
             <a:pPr lvl="3"/>
             <a:r>
-              <a:rPr lang="zh-TW" altLang="en-US" smtClean="0"/>
+              <a:rPr lang="zh-TW" altLang="en-US"/>
               <a:t>第四層</a:t>
             </a:r>
           </a:p>
           <a:p>
             <a:pPr lvl="4"/>
             <a:r>
-              <a:rPr lang="zh-TW" altLang="en-US" smtClean="0"/>
+              <a:rPr lang="zh-TW" altLang="en-US"/>
               <a:t>第五層</a:t>
             </a:r>
-            <a:endParaRPr lang="zh-TW" altLang="en-US"/>
           </a:p>
         </p:txBody>
       </p:sp>
@@ -2212,7 +2194,7 @@
           <a:p>
             <a:pPr lvl="0"/>
             <a:r>
-              <a:rPr lang="zh-TW" altLang="en-US" smtClean="0"/>
+              <a:rPr lang="zh-TW" altLang="en-US"/>
               <a:t>按一下以編輯母片文字樣式</a:t>
             </a:r>
           </a:p>
@@ -2235,7 +2217,7 @@
           <a:p>
             <a:fld id="{2CCF1B83-BCEE-41D4-A1FA-45F394F0455A}" type="datetimeFigureOut">
               <a:rPr lang="zh-TW" altLang="en-US" smtClean="0"/>
-              <a:t>2021/11/12</a:t>
+              <a:t>2024/4/13</a:t>
             </a:fld>
             <a:endParaRPr lang="zh-TW" altLang="en-US"/>
           </a:p>
@@ -2333,10 +2315,9 @@
           </a:lstStyle>
           <a:p>
             <a:r>
-              <a:rPr lang="zh-TW" altLang="en-US" smtClean="0"/>
+              <a:rPr lang="zh-TW" altLang="en-US"/>
               <a:t>按一下以編輯母片標題樣式</a:t>
             </a:r>
-            <a:endParaRPr lang="zh-TW" altLang="en-US"/>
           </a:p>
         </p:txBody>
       </p:sp>
@@ -2398,10 +2379,9 @@
           </a:lstStyle>
           <a:p>
             <a:r>
-              <a:rPr lang="zh-TW" altLang="en-US" smtClean="0"/>
+              <a:rPr lang="zh-TW" altLang="en-US"/>
               <a:t>按一下圖示以新增圖片</a:t>
             </a:r>
-            <a:endParaRPr lang="zh-TW" altLang="en-US"/>
           </a:p>
         </p:txBody>
       </p:sp>
@@ -2464,7 +2444,7 @@
           <a:p>
             <a:pPr lvl="0"/>
             <a:r>
-              <a:rPr lang="zh-TW" altLang="en-US" smtClean="0"/>
+              <a:rPr lang="zh-TW" altLang="en-US"/>
               <a:t>按一下以編輯母片文字樣式</a:t>
             </a:r>
           </a:p>
@@ -2487,7 +2467,7 @@
           <a:p>
             <a:fld id="{2CCF1B83-BCEE-41D4-A1FA-45F394F0455A}" type="datetimeFigureOut">
               <a:rPr lang="zh-TW" altLang="en-US" smtClean="0"/>
-              <a:t>2021/11/12</a:t>
+              <a:t>2024/4/13</a:t>
             </a:fld>
             <a:endParaRPr lang="zh-TW" altLang="en-US"/>
           </a:p>
@@ -2596,10 +2576,9 @@
           <a:lstStyle/>
           <a:p>
             <a:r>
-              <a:rPr lang="zh-TW" altLang="en-US" smtClean="0"/>
+              <a:rPr lang="zh-TW" altLang="en-US"/>
               <a:t>按一下以編輯母片標題樣式</a:t>
             </a:r>
-            <a:endParaRPr lang="zh-TW" altLang="en-US"/>
           </a:p>
         </p:txBody>
       </p:sp>
@@ -2630,38 +2609,37 @@
           <a:p>
             <a:pPr lvl="0"/>
             <a:r>
-              <a:rPr lang="zh-TW" altLang="en-US" smtClean="0"/>
+              <a:rPr lang="zh-TW" altLang="en-US"/>
               <a:t>按一下以編輯母片文字樣式</a:t>
             </a:r>
           </a:p>
           <a:p>
             <a:pPr lvl="1"/>
             <a:r>
-              <a:rPr lang="zh-TW" altLang="en-US" smtClean="0"/>
+              <a:rPr lang="zh-TW" altLang="en-US"/>
               <a:t>第二層</a:t>
             </a:r>
           </a:p>
           <a:p>
             <a:pPr lvl="2"/>
             <a:r>
-              <a:rPr lang="zh-TW" altLang="en-US" smtClean="0"/>
+              <a:rPr lang="zh-TW" altLang="en-US"/>
               <a:t>第三層</a:t>
             </a:r>
           </a:p>
           <a:p>
             <a:pPr lvl="3"/>
             <a:r>
-              <a:rPr lang="zh-TW" altLang="en-US" smtClean="0"/>
+              <a:rPr lang="zh-TW" altLang="en-US"/>
               <a:t>第四層</a:t>
             </a:r>
           </a:p>
           <a:p>
             <a:pPr lvl="4"/>
             <a:r>
-              <a:rPr lang="zh-TW" altLang="en-US" smtClean="0"/>
+              <a:rPr lang="zh-TW" altLang="en-US"/>
               <a:t>第五層</a:t>
             </a:r>
-            <a:endParaRPr lang="zh-TW" altLang="en-US"/>
           </a:p>
         </p:txBody>
       </p:sp>
@@ -2700,7 +2678,7 @@
           <a:p>
             <a:fld id="{2CCF1B83-BCEE-41D4-A1FA-45F394F0455A}" type="datetimeFigureOut">
               <a:rPr lang="zh-TW" altLang="en-US" smtClean="0"/>
-              <a:t>2021/11/12</a:t>
+              <a:t>2024/4/13</a:t>
             </a:fld>
             <a:endParaRPr lang="zh-TW" altLang="en-US"/>
           </a:p>
@@ -3124,7 +3102,7 @@
                 <a:latin typeface="微軟正黑體" pitchFamily="34" charset="-120"/>
                 <a:ea typeface="微軟正黑體" pitchFamily="34" charset="-120"/>
               </a:rPr>
-              <a:t>袮</a:t>
+              <a:t>祢</a:t>
             </a:r>
             <a:r>
               <a:rPr lang="zh-TW" altLang="en-US" sz="7200" b="1" i="1" dirty="0">
@@ -3241,7 +3219,7 @@
                 <a:latin typeface="微軟正黑體" pitchFamily="34" charset="-120"/>
                 <a:ea typeface="微軟正黑體" pitchFamily="34" charset="-120"/>
               </a:rPr>
-              <a:t>袮</a:t>
+              <a:t>祢</a:t>
             </a:r>
             <a:r>
               <a:rPr lang="zh-TW" altLang="en-US" sz="6400" b="1" dirty="0">
@@ -3271,8 +3249,8 @@
         </p:nvSpPr>
         <p:spPr>
           <a:xfrm>
-            <a:off x="0" y="5311662"/>
-            <a:ext cx="12192000" cy="769441"/>
+            <a:off x="0" y="5373217"/>
+            <a:ext cx="12192000" cy="646331"/>
           </a:xfrm>
           <a:prstGeom prst="rect">
             <a:avLst/>
@@ -3287,66 +3265,49 @@
           <a:p>
             <a:pPr algn="ctr"/>
             <a:r>
-              <a:rPr lang="en-US" sz="4400" b="1" dirty="0">
-                <a:solidFill>
-                  <a:srgbClr val="000066"/>
-                </a:solidFill>
-                <a:effectLst/>
+              <a:rPr lang="en-US" sz="3600" b="1" dirty="0">
+                <a:solidFill>
+                  <a:srgbClr val="000066"/>
+                </a:solidFill>
                 <a:latin typeface="Microsoft JhengHei" panose="020B0604030504040204" pitchFamily="34" charset="-120"/>
                 <a:ea typeface="Microsoft JhengHei" panose="020B0604030504040204" pitchFamily="34" charset="-120"/>
               </a:rPr>
               <a:t>( </a:t>
             </a:r>
             <a:r>
-              <a:rPr lang="zh-CN" altLang="en-US" sz="4400" b="1" dirty="0" smtClean="0">
-                <a:solidFill>
-                  <a:srgbClr val="000066"/>
-                </a:solidFill>
-                <a:effectLst/>
+              <a:rPr lang="zh-CN" altLang="en-US" sz="3600" b="1" dirty="0">
+                <a:solidFill>
+                  <a:srgbClr val="000066"/>
+                </a:solidFill>
                 <a:latin typeface="Microsoft JhengHei" panose="020B0604030504040204" pitchFamily="34" charset="-120"/>
                 <a:ea typeface="Microsoft JhengHei" panose="020B0604030504040204" pitchFamily="34" charset="-120"/>
               </a:rPr>
-              <a:t>副</a:t>
-            </a:r>
-            <a:r>
-              <a:rPr lang="en-US" altLang="zh-CN" sz="4400" b="1" dirty="0" smtClean="0">
-                <a:solidFill>
-                  <a:srgbClr val="000066"/>
-                </a:solidFill>
-                <a:effectLst/>
+              <a:t>副歌 </a:t>
+            </a:r>
+            <a:r>
+              <a:rPr lang="en-US" altLang="zh-CN" sz="3600" b="1" dirty="0">
+                <a:solidFill>
+                  <a:srgbClr val="000066"/>
+                </a:solidFill>
                 <a:latin typeface="Microsoft JhengHei" panose="020B0604030504040204" pitchFamily="34" charset="-120"/>
                 <a:ea typeface="Microsoft JhengHei" panose="020B0604030504040204" pitchFamily="34" charset="-120"/>
               </a:rPr>
-              <a:t> 2</a:t>
-            </a:r>
-            <a:r>
-              <a:rPr lang="en-US" sz="4400" b="1" dirty="0" smtClean="0">
-                <a:solidFill>
-                  <a:srgbClr val="000066"/>
-                </a:solidFill>
-                <a:effectLst/>
+              <a:t>2</a:t>
+            </a:r>
+            <a:r>
+              <a:rPr lang="en-US" sz="3600" b="1" dirty="0">
+                <a:solidFill>
+                  <a:srgbClr val="000066"/>
+                </a:solidFill>
                 <a:latin typeface="Microsoft JhengHei" panose="020B0604030504040204" pitchFamily="34" charset="-120"/>
                 <a:ea typeface="Microsoft JhengHei" panose="020B0604030504040204" pitchFamily="34" charset="-120"/>
               </a:rPr>
-              <a:t> </a:t>
-            </a:r>
-            <a:r>
-              <a:rPr lang="en-US" sz="4400" b="1" dirty="0">
-                <a:solidFill>
-                  <a:srgbClr val="000066"/>
-                </a:solidFill>
-                <a:effectLst/>
-                <a:latin typeface="Microsoft JhengHei" panose="020B0604030504040204" pitchFamily="34" charset="-120"/>
-                <a:ea typeface="Microsoft JhengHei" panose="020B0604030504040204" pitchFamily="34" charset="-120"/>
-              </a:rPr>
-              <a:t>)</a:t>
-            </a:r>
-            <a:endParaRPr lang="vi-VN" sz="4400" b="1" dirty="0">
+              <a:t> )</a:t>
+            </a:r>
+            <a:endParaRPr lang="vi-VN" sz="3600" b="1" dirty="0">
               <a:solidFill>
                 <a:srgbClr val="000066"/>
               </a:solidFill>
-              <a:effectLst/>
-              <a:latin typeface="Microsoft JhengHei" panose="020B0604030504040204" pitchFamily="34" charset="-120"/>
               <a:ea typeface="Microsoft JhengHei" panose="020B0604030504040204" pitchFamily="34" charset="-120"/>
             </a:endParaRPr>
           </a:p>
@@ -3425,7 +3386,7 @@
                 <a:latin typeface="微軟正黑體" pitchFamily="34" charset="-120"/>
                 <a:ea typeface="微軟正黑體" pitchFamily="34" charset="-120"/>
               </a:rPr>
-              <a:t>袮</a:t>
+              <a:t>祢</a:t>
             </a:r>
             <a:r>
               <a:rPr lang="zh-TW" altLang="en-US" sz="6400" b="1" dirty="0">
@@ -3453,8 +3414,8 @@
         </p:nvSpPr>
         <p:spPr>
           <a:xfrm>
-            <a:off x="0" y="5311662"/>
-            <a:ext cx="12192000" cy="769441"/>
+            <a:off x="0" y="5373217"/>
+            <a:ext cx="12192000" cy="646331"/>
           </a:xfrm>
           <a:prstGeom prst="rect">
             <a:avLst/>
@@ -3469,66 +3430,49 @@
           <a:p>
             <a:pPr algn="ctr"/>
             <a:r>
-              <a:rPr lang="en-US" sz="4400" b="1" dirty="0">
-                <a:solidFill>
-                  <a:srgbClr val="000066"/>
-                </a:solidFill>
-                <a:effectLst/>
+              <a:rPr lang="en-US" sz="3600" b="1" dirty="0">
+                <a:solidFill>
+                  <a:srgbClr val="000066"/>
+                </a:solidFill>
                 <a:latin typeface="Microsoft JhengHei" panose="020B0604030504040204" pitchFamily="34" charset="-120"/>
                 <a:ea typeface="Microsoft JhengHei" panose="020B0604030504040204" pitchFamily="34" charset="-120"/>
               </a:rPr>
               <a:t>( </a:t>
             </a:r>
             <a:r>
-              <a:rPr lang="zh-CN" altLang="en-US" sz="4400" b="1" dirty="0" smtClean="0">
-                <a:solidFill>
-                  <a:srgbClr val="000066"/>
-                </a:solidFill>
-                <a:effectLst/>
+              <a:rPr lang="zh-CN" altLang="en-US" sz="3600" b="1" dirty="0">
+                <a:solidFill>
+                  <a:srgbClr val="000066"/>
+                </a:solidFill>
                 <a:latin typeface="Microsoft JhengHei" panose="020B0604030504040204" pitchFamily="34" charset="-120"/>
                 <a:ea typeface="Microsoft JhengHei" panose="020B0604030504040204" pitchFamily="34" charset="-120"/>
               </a:rPr>
-              <a:t>副</a:t>
-            </a:r>
-            <a:r>
-              <a:rPr lang="en-US" altLang="zh-CN" sz="4400" b="1" dirty="0" smtClean="0">
-                <a:solidFill>
-                  <a:srgbClr val="000066"/>
-                </a:solidFill>
-                <a:effectLst/>
+              <a:t>副歌 </a:t>
+            </a:r>
+            <a:r>
+              <a:rPr lang="en-US" altLang="zh-CN" sz="3600" b="1" dirty="0">
+                <a:solidFill>
+                  <a:srgbClr val="000066"/>
+                </a:solidFill>
                 <a:latin typeface="Microsoft JhengHei" panose="020B0604030504040204" pitchFamily="34" charset="-120"/>
                 <a:ea typeface="Microsoft JhengHei" panose="020B0604030504040204" pitchFamily="34" charset="-120"/>
               </a:rPr>
-              <a:t> 2</a:t>
-            </a:r>
-            <a:r>
-              <a:rPr lang="en-US" sz="4400" b="1" dirty="0" smtClean="0">
-                <a:solidFill>
-                  <a:srgbClr val="000066"/>
-                </a:solidFill>
-                <a:effectLst/>
+              <a:t>2</a:t>
+            </a:r>
+            <a:r>
+              <a:rPr lang="en-US" sz="3600" b="1" dirty="0">
+                <a:solidFill>
+                  <a:srgbClr val="000066"/>
+                </a:solidFill>
                 <a:latin typeface="Microsoft JhengHei" panose="020B0604030504040204" pitchFamily="34" charset="-120"/>
                 <a:ea typeface="Microsoft JhengHei" panose="020B0604030504040204" pitchFamily="34" charset="-120"/>
               </a:rPr>
-              <a:t> </a:t>
-            </a:r>
-            <a:r>
-              <a:rPr lang="en-US" sz="4400" b="1" dirty="0">
-                <a:solidFill>
-                  <a:srgbClr val="000066"/>
-                </a:solidFill>
-                <a:effectLst/>
-                <a:latin typeface="Microsoft JhengHei" panose="020B0604030504040204" pitchFamily="34" charset="-120"/>
-                <a:ea typeface="Microsoft JhengHei" panose="020B0604030504040204" pitchFamily="34" charset="-120"/>
-              </a:rPr>
-              <a:t>)</a:t>
-            </a:r>
-            <a:endParaRPr lang="vi-VN" sz="4400" b="1" dirty="0">
+              <a:t> )</a:t>
+            </a:r>
+            <a:endParaRPr lang="vi-VN" sz="3600" b="1" dirty="0">
               <a:solidFill>
                 <a:srgbClr val="000066"/>
               </a:solidFill>
-              <a:effectLst/>
-              <a:latin typeface="Microsoft JhengHei" panose="020B0604030504040204" pitchFamily="34" charset="-120"/>
               <a:ea typeface="Microsoft JhengHei" panose="020B0604030504040204" pitchFamily="34" charset="-120"/>
             </a:endParaRPr>
           </a:p>
@@ -3632,7 +3576,7 @@
                 <a:latin typeface="微軟正黑體" pitchFamily="34" charset="-120"/>
                 <a:ea typeface="微軟正黑體" pitchFamily="34" charset="-120"/>
               </a:rPr>
-              <a:t>袮</a:t>
+              <a:t>祢</a:t>
             </a:r>
             <a:r>
               <a:rPr lang="zh-TW" altLang="en-US" sz="6400" b="1" dirty="0">
@@ -3662,8 +3606,8 @@
         </p:nvSpPr>
         <p:spPr>
           <a:xfrm>
-            <a:off x="0" y="5311662"/>
-            <a:ext cx="12192000" cy="769441"/>
+            <a:off x="0" y="5373217"/>
+            <a:ext cx="12192000" cy="646331"/>
           </a:xfrm>
           <a:prstGeom prst="rect">
             <a:avLst/>
@@ -3678,7 +3622,7 @@
           <a:p>
             <a:pPr algn="ctr"/>
             <a:r>
-              <a:rPr lang="en-US" sz="4400" b="1" dirty="0">
+              <a:rPr lang="en-US" sz="3600" b="1" dirty="0">
                 <a:solidFill>
                   <a:srgbClr val="000066"/>
                 </a:solidFill>
@@ -3689,7 +3633,7 @@
               <a:t>( </a:t>
             </a:r>
             <a:r>
-              <a:rPr lang="zh-CN" altLang="en-US" sz="4400" b="1" dirty="0">
+              <a:rPr lang="zh-CN" altLang="en-US" sz="3600" b="1" dirty="0">
                 <a:solidFill>
                   <a:srgbClr val="000066"/>
                 </a:solidFill>
@@ -3697,10 +3641,10 @@
                 <a:latin typeface="Microsoft JhengHei" panose="020B0604030504040204" pitchFamily="34" charset="-120"/>
                 <a:ea typeface="Microsoft JhengHei" panose="020B0604030504040204" pitchFamily="34" charset="-120"/>
               </a:rPr>
-              <a:t>正</a:t>
-            </a:r>
-            <a:r>
-              <a:rPr lang="en-US" sz="4400" b="1" dirty="0">
+              <a:t>正歌</a:t>
+            </a:r>
+            <a:r>
+              <a:rPr lang="en-US" sz="3600" b="1" dirty="0">
                 <a:solidFill>
                   <a:srgbClr val="000066"/>
                 </a:solidFill>
@@ -3710,7 +3654,7 @@
               </a:rPr>
               <a:t> )</a:t>
             </a:r>
-            <a:endParaRPr lang="vi-VN" sz="4400" b="1" dirty="0">
+            <a:endParaRPr lang="vi-VN" sz="3600" b="1" dirty="0">
               <a:solidFill>
                 <a:srgbClr val="000066"/>
               </a:solidFill>
@@ -3794,7 +3738,7 @@
                 <a:latin typeface="微軟正黑體" pitchFamily="34" charset="-120"/>
                 <a:ea typeface="微軟正黑體" pitchFamily="34" charset="-120"/>
               </a:rPr>
-              <a:t>袮</a:t>
+              <a:t>祢</a:t>
             </a:r>
             <a:r>
               <a:rPr lang="zh-TW" altLang="en-US" sz="6400" b="1" dirty="0">
@@ -3824,8 +3768,8 @@
         </p:nvSpPr>
         <p:spPr>
           <a:xfrm>
-            <a:off x="0" y="5311662"/>
-            <a:ext cx="12192000" cy="769441"/>
+            <a:off x="0" y="5373217"/>
+            <a:ext cx="12192000" cy="646331"/>
           </a:xfrm>
           <a:prstGeom prst="rect">
             <a:avLst/>
@@ -3840,44 +3784,39 @@
           <a:p>
             <a:pPr algn="ctr"/>
             <a:r>
-              <a:rPr lang="en-US" sz="4400" b="1" dirty="0">
-                <a:solidFill>
-                  <a:srgbClr val="000066"/>
-                </a:solidFill>
-                <a:effectLst/>
+              <a:rPr lang="en-US" sz="3600" b="1" dirty="0">
+                <a:solidFill>
+                  <a:srgbClr val="000066"/>
+                </a:solidFill>
                 <a:latin typeface="Microsoft JhengHei" panose="020B0604030504040204" pitchFamily="34" charset="-120"/>
                 <a:ea typeface="Microsoft JhengHei" panose="020B0604030504040204" pitchFamily="34" charset="-120"/>
               </a:rPr>
               <a:t>( </a:t>
             </a:r>
             <a:r>
-              <a:rPr lang="zh-CN" altLang="en-US" sz="4400" b="1" dirty="0">
-                <a:solidFill>
-                  <a:srgbClr val="000066"/>
-                </a:solidFill>
-                <a:effectLst/>
+              <a:rPr lang="zh-CN" altLang="en-US" sz="3600" b="1" dirty="0">
+                <a:solidFill>
+                  <a:srgbClr val="000066"/>
+                </a:solidFill>
                 <a:latin typeface="Microsoft JhengHei" panose="020B0604030504040204" pitchFamily="34" charset="-120"/>
                 <a:ea typeface="Microsoft JhengHei" panose="020B0604030504040204" pitchFamily="34" charset="-120"/>
               </a:rPr>
-              <a:t>正</a:t>
-            </a:r>
-            <a:r>
-              <a:rPr lang="en-US" sz="4400" b="1" dirty="0">
-                <a:solidFill>
-                  <a:srgbClr val="000066"/>
-                </a:solidFill>
-                <a:effectLst/>
+              <a:t>正歌 </a:t>
+            </a:r>
+            <a:r>
+              <a:rPr lang="en-US" sz="3600" b="1" dirty="0">
+                <a:solidFill>
+                  <a:srgbClr val="000066"/>
+                </a:solidFill>
                 <a:latin typeface="Microsoft JhengHei" panose="020B0604030504040204" pitchFamily="34" charset="-120"/>
                 <a:ea typeface="Microsoft JhengHei" panose="020B0604030504040204" pitchFamily="34" charset="-120"/>
               </a:rPr>
-              <a:t> )</a:t>
-            </a:r>
-            <a:endParaRPr lang="vi-VN" sz="4400" b="1" dirty="0">
+              <a:t>)</a:t>
+            </a:r>
+            <a:endParaRPr lang="vi-VN" sz="3600" b="1" dirty="0">
               <a:solidFill>
                 <a:srgbClr val="000066"/>
               </a:solidFill>
-              <a:effectLst/>
-              <a:latin typeface="Microsoft JhengHei" panose="020B0604030504040204" pitchFamily="34" charset="-120"/>
               <a:ea typeface="Microsoft JhengHei" panose="020B0604030504040204" pitchFamily="34" charset="-120"/>
             </a:endParaRPr>
           </a:p>
@@ -3988,8 +3927,8 @@
         </p:nvSpPr>
         <p:spPr>
           <a:xfrm>
-            <a:off x="0" y="5311662"/>
-            <a:ext cx="12192000" cy="769441"/>
+            <a:off x="0" y="5373217"/>
+            <a:ext cx="12192000" cy="646331"/>
           </a:xfrm>
           <a:prstGeom prst="rect">
             <a:avLst/>
@@ -4004,44 +3943,39 @@
           <a:p>
             <a:pPr algn="ctr"/>
             <a:r>
-              <a:rPr lang="en-US" sz="4400" b="1" dirty="0">
-                <a:solidFill>
-                  <a:srgbClr val="000066"/>
-                </a:solidFill>
-                <a:effectLst/>
+              <a:rPr lang="en-US" sz="3600" b="1" dirty="0">
+                <a:solidFill>
+                  <a:srgbClr val="000066"/>
+                </a:solidFill>
                 <a:latin typeface="Microsoft JhengHei" panose="020B0604030504040204" pitchFamily="34" charset="-120"/>
                 <a:ea typeface="Microsoft JhengHei" panose="020B0604030504040204" pitchFamily="34" charset="-120"/>
               </a:rPr>
               <a:t>( </a:t>
             </a:r>
             <a:r>
-              <a:rPr lang="zh-CN" altLang="en-US" sz="4400" b="1" dirty="0">
-                <a:solidFill>
-                  <a:srgbClr val="000066"/>
-                </a:solidFill>
-                <a:effectLst/>
+              <a:rPr lang="zh-CN" altLang="en-US" sz="3600" b="1" dirty="0">
+                <a:solidFill>
+                  <a:srgbClr val="000066"/>
+                </a:solidFill>
                 <a:latin typeface="Microsoft JhengHei" panose="020B0604030504040204" pitchFamily="34" charset="-120"/>
                 <a:ea typeface="Microsoft JhengHei" panose="020B0604030504040204" pitchFamily="34" charset="-120"/>
               </a:rPr>
-              <a:t>正</a:t>
-            </a:r>
-            <a:r>
-              <a:rPr lang="en-US" sz="4400" b="1" dirty="0">
-                <a:solidFill>
-                  <a:srgbClr val="000066"/>
-                </a:solidFill>
-                <a:effectLst/>
+              <a:t>正歌 </a:t>
+            </a:r>
+            <a:r>
+              <a:rPr lang="en-US" sz="3600" b="1" dirty="0">
+                <a:solidFill>
+                  <a:srgbClr val="000066"/>
+                </a:solidFill>
                 <a:latin typeface="Microsoft JhengHei" panose="020B0604030504040204" pitchFamily="34" charset="-120"/>
                 <a:ea typeface="Microsoft JhengHei" panose="020B0604030504040204" pitchFamily="34" charset="-120"/>
               </a:rPr>
-              <a:t> )</a:t>
-            </a:r>
-            <a:endParaRPr lang="vi-VN" sz="4400" b="1" dirty="0">
+              <a:t>)</a:t>
+            </a:r>
+            <a:endParaRPr lang="vi-VN" sz="3600" b="1" dirty="0">
               <a:solidFill>
                 <a:srgbClr val="000066"/>
               </a:solidFill>
-              <a:effectLst/>
-              <a:latin typeface="Microsoft JhengHei" panose="020B0604030504040204" pitchFamily="34" charset="-120"/>
               <a:ea typeface="Microsoft JhengHei" panose="020B0604030504040204" pitchFamily="34" charset="-120"/>
             </a:endParaRPr>
           </a:p>
@@ -4120,7 +4054,7 @@
                 <a:latin typeface="微軟正黑體" pitchFamily="34" charset="-120"/>
                 <a:ea typeface="微軟正黑體" pitchFamily="34" charset="-120"/>
               </a:rPr>
-              <a:t>袮</a:t>
+              <a:t>祢</a:t>
             </a:r>
             <a:r>
               <a:rPr lang="zh-TW" altLang="en-US" sz="6400" b="1" dirty="0">
@@ -4150,8 +4084,8 @@
         </p:nvSpPr>
         <p:spPr>
           <a:xfrm>
-            <a:off x="0" y="5311662"/>
-            <a:ext cx="12192000" cy="769441"/>
+            <a:off x="0" y="5373217"/>
+            <a:ext cx="12192000" cy="646331"/>
           </a:xfrm>
           <a:prstGeom prst="rect">
             <a:avLst/>
@@ -4166,44 +4100,39 @@
           <a:p>
             <a:pPr algn="ctr"/>
             <a:r>
-              <a:rPr lang="en-US" sz="4400" b="1" dirty="0">
-                <a:solidFill>
-                  <a:srgbClr val="000066"/>
-                </a:solidFill>
-                <a:effectLst/>
+              <a:rPr lang="en-US" sz="3600" b="1" dirty="0">
+                <a:solidFill>
+                  <a:srgbClr val="000066"/>
+                </a:solidFill>
                 <a:latin typeface="Microsoft JhengHei" panose="020B0604030504040204" pitchFamily="34" charset="-120"/>
                 <a:ea typeface="Microsoft JhengHei" panose="020B0604030504040204" pitchFamily="34" charset="-120"/>
               </a:rPr>
               <a:t>( </a:t>
             </a:r>
             <a:r>
-              <a:rPr lang="zh-CN" altLang="en-US" sz="4400" b="1" dirty="0">
-                <a:solidFill>
-                  <a:srgbClr val="000066"/>
-                </a:solidFill>
-                <a:effectLst/>
+              <a:rPr lang="zh-CN" altLang="en-US" sz="3600" b="1" dirty="0">
+                <a:solidFill>
+                  <a:srgbClr val="000066"/>
+                </a:solidFill>
                 <a:latin typeface="Microsoft JhengHei" panose="020B0604030504040204" pitchFamily="34" charset="-120"/>
                 <a:ea typeface="Microsoft JhengHei" panose="020B0604030504040204" pitchFamily="34" charset="-120"/>
               </a:rPr>
-              <a:t>正</a:t>
-            </a:r>
-            <a:r>
-              <a:rPr lang="en-US" sz="4400" b="1" dirty="0">
-                <a:solidFill>
-                  <a:srgbClr val="000066"/>
-                </a:solidFill>
-                <a:effectLst/>
+              <a:t>正歌 </a:t>
+            </a:r>
+            <a:r>
+              <a:rPr lang="en-US" sz="3600" b="1" dirty="0">
+                <a:solidFill>
+                  <a:srgbClr val="000066"/>
+                </a:solidFill>
                 <a:latin typeface="Microsoft JhengHei" panose="020B0604030504040204" pitchFamily="34" charset="-120"/>
                 <a:ea typeface="Microsoft JhengHei" panose="020B0604030504040204" pitchFamily="34" charset="-120"/>
               </a:rPr>
-              <a:t> )</a:t>
-            </a:r>
-            <a:endParaRPr lang="vi-VN" sz="4400" b="1" dirty="0">
+              <a:t>)</a:t>
+            </a:r>
+            <a:endParaRPr lang="vi-VN" sz="3600" b="1" dirty="0">
               <a:solidFill>
                 <a:srgbClr val="000066"/>
               </a:solidFill>
-              <a:effectLst/>
-              <a:latin typeface="Microsoft JhengHei" panose="020B0604030504040204" pitchFamily="34" charset="-120"/>
               <a:ea typeface="Microsoft JhengHei" panose="020B0604030504040204" pitchFamily="34" charset="-120"/>
             </a:endParaRPr>
           </a:p>
@@ -4282,7 +4211,7 @@
                 <a:latin typeface="微軟正黑體" pitchFamily="34" charset="-120"/>
                 <a:ea typeface="微軟正黑體" pitchFamily="34" charset="-120"/>
               </a:rPr>
-              <a:t>袮</a:t>
+              <a:t>祢</a:t>
             </a:r>
             <a:r>
               <a:rPr lang="zh-TW" altLang="en-US" sz="6400" b="1" dirty="0">
@@ -4334,8 +4263,8 @@
         </p:nvSpPr>
         <p:spPr>
           <a:xfrm>
-            <a:off x="0" y="5311662"/>
-            <a:ext cx="12192000" cy="769441"/>
+            <a:off x="0" y="5373217"/>
+            <a:ext cx="12192000" cy="646331"/>
           </a:xfrm>
           <a:prstGeom prst="rect">
             <a:avLst/>
@@ -4350,66 +4279,49 @@
           <a:p>
             <a:pPr algn="ctr"/>
             <a:r>
-              <a:rPr lang="en-US" sz="4400" b="1" dirty="0">
-                <a:solidFill>
-                  <a:srgbClr val="000066"/>
-                </a:solidFill>
-                <a:effectLst/>
+              <a:rPr lang="en-US" sz="3600" b="1" dirty="0">
+                <a:solidFill>
+                  <a:srgbClr val="000066"/>
+                </a:solidFill>
                 <a:latin typeface="Microsoft JhengHei" panose="020B0604030504040204" pitchFamily="34" charset="-120"/>
                 <a:ea typeface="Microsoft JhengHei" panose="020B0604030504040204" pitchFamily="34" charset="-120"/>
               </a:rPr>
               <a:t>( </a:t>
             </a:r>
             <a:r>
-              <a:rPr lang="zh-CN" altLang="en-US" sz="4400" b="1" dirty="0" smtClean="0">
-                <a:solidFill>
-                  <a:srgbClr val="000066"/>
-                </a:solidFill>
-                <a:effectLst/>
+              <a:rPr lang="zh-CN" altLang="en-US" sz="3600" b="1" dirty="0">
+                <a:solidFill>
+                  <a:srgbClr val="000066"/>
+                </a:solidFill>
                 <a:latin typeface="Microsoft JhengHei" panose="020B0604030504040204" pitchFamily="34" charset="-120"/>
                 <a:ea typeface="Microsoft JhengHei" panose="020B0604030504040204" pitchFamily="34" charset="-120"/>
               </a:rPr>
-              <a:t>副</a:t>
-            </a:r>
-            <a:r>
-              <a:rPr lang="en-US" altLang="zh-CN" sz="4400" b="1" dirty="0" smtClean="0">
-                <a:solidFill>
-                  <a:srgbClr val="000066"/>
-                </a:solidFill>
-                <a:effectLst/>
+              <a:t>副歌 </a:t>
+            </a:r>
+            <a:r>
+              <a:rPr lang="en-US" altLang="zh-CN" sz="3600" b="1" dirty="0">
+                <a:solidFill>
+                  <a:srgbClr val="000066"/>
+                </a:solidFill>
                 <a:latin typeface="Microsoft JhengHei" panose="020B0604030504040204" pitchFamily="34" charset="-120"/>
                 <a:ea typeface="Microsoft JhengHei" panose="020B0604030504040204" pitchFamily="34" charset="-120"/>
               </a:rPr>
-              <a:t> 1</a:t>
-            </a:r>
-            <a:r>
-              <a:rPr lang="en-US" sz="4400" b="1" dirty="0" smtClean="0">
-                <a:solidFill>
-                  <a:srgbClr val="000066"/>
-                </a:solidFill>
-                <a:effectLst/>
+              <a:t>1</a:t>
+            </a:r>
+            <a:r>
+              <a:rPr lang="en-US" sz="3600" b="1" dirty="0">
+                <a:solidFill>
+                  <a:srgbClr val="000066"/>
+                </a:solidFill>
                 <a:latin typeface="Microsoft JhengHei" panose="020B0604030504040204" pitchFamily="34" charset="-120"/>
                 <a:ea typeface="Microsoft JhengHei" panose="020B0604030504040204" pitchFamily="34" charset="-120"/>
               </a:rPr>
-              <a:t> </a:t>
-            </a:r>
-            <a:r>
-              <a:rPr lang="en-US" sz="4400" b="1" dirty="0">
-                <a:solidFill>
-                  <a:srgbClr val="000066"/>
-                </a:solidFill>
-                <a:effectLst/>
-                <a:latin typeface="Microsoft JhengHei" panose="020B0604030504040204" pitchFamily="34" charset="-120"/>
-                <a:ea typeface="Microsoft JhengHei" panose="020B0604030504040204" pitchFamily="34" charset="-120"/>
-              </a:rPr>
-              <a:t>)</a:t>
-            </a:r>
-            <a:endParaRPr lang="vi-VN" sz="4400" b="1" dirty="0">
+              <a:t> )</a:t>
+            </a:r>
+            <a:endParaRPr lang="vi-VN" sz="3600" b="1" dirty="0">
               <a:solidFill>
                 <a:srgbClr val="000066"/>
               </a:solidFill>
-              <a:effectLst/>
-              <a:latin typeface="Microsoft JhengHei" panose="020B0604030504040204" pitchFamily="34" charset="-120"/>
               <a:ea typeface="Microsoft JhengHei" panose="020B0604030504040204" pitchFamily="34" charset="-120"/>
             </a:endParaRPr>
           </a:p>
@@ -4510,7 +4422,7 @@
                 <a:latin typeface="微軟正黑體" pitchFamily="34" charset="-120"/>
                 <a:ea typeface="微軟正黑體" pitchFamily="34" charset="-120"/>
               </a:rPr>
-              <a:t>袮</a:t>
+              <a:t>祢</a:t>
             </a:r>
             <a:r>
               <a:rPr lang="zh-TW" altLang="en-US" sz="6400" b="1" dirty="0">
@@ -4540,8 +4452,8 @@
         </p:nvSpPr>
         <p:spPr>
           <a:xfrm>
-            <a:off x="0" y="5311662"/>
-            <a:ext cx="12192000" cy="769441"/>
+            <a:off x="0" y="5373217"/>
+            <a:ext cx="12192000" cy="646331"/>
           </a:xfrm>
           <a:prstGeom prst="rect">
             <a:avLst/>
@@ -4556,66 +4468,49 @@
           <a:p>
             <a:pPr algn="ctr"/>
             <a:r>
-              <a:rPr lang="en-US" sz="4400" b="1" dirty="0">
-                <a:solidFill>
-                  <a:srgbClr val="000066"/>
-                </a:solidFill>
-                <a:effectLst/>
+              <a:rPr lang="en-US" sz="3600" b="1" dirty="0">
+                <a:solidFill>
+                  <a:srgbClr val="000066"/>
+                </a:solidFill>
                 <a:latin typeface="Microsoft JhengHei" panose="020B0604030504040204" pitchFamily="34" charset="-120"/>
                 <a:ea typeface="Microsoft JhengHei" panose="020B0604030504040204" pitchFamily="34" charset="-120"/>
               </a:rPr>
               <a:t>( </a:t>
             </a:r>
             <a:r>
-              <a:rPr lang="zh-CN" altLang="en-US" sz="4400" b="1" dirty="0" smtClean="0">
-                <a:solidFill>
-                  <a:srgbClr val="000066"/>
-                </a:solidFill>
-                <a:effectLst/>
+              <a:rPr lang="zh-CN" altLang="en-US" sz="3600" b="1" dirty="0">
+                <a:solidFill>
+                  <a:srgbClr val="000066"/>
+                </a:solidFill>
                 <a:latin typeface="Microsoft JhengHei" panose="020B0604030504040204" pitchFamily="34" charset="-120"/>
                 <a:ea typeface="Microsoft JhengHei" panose="020B0604030504040204" pitchFamily="34" charset="-120"/>
               </a:rPr>
-              <a:t>副</a:t>
-            </a:r>
-            <a:r>
-              <a:rPr lang="en-US" altLang="zh-CN" sz="4400" b="1" dirty="0" smtClean="0">
-                <a:solidFill>
-                  <a:srgbClr val="000066"/>
-                </a:solidFill>
-                <a:effectLst/>
+              <a:t>副歌 </a:t>
+            </a:r>
+            <a:r>
+              <a:rPr lang="en-US" altLang="zh-CN" sz="3600" b="1" dirty="0">
+                <a:solidFill>
+                  <a:srgbClr val="000066"/>
+                </a:solidFill>
                 <a:latin typeface="Microsoft JhengHei" panose="020B0604030504040204" pitchFamily="34" charset="-120"/>
                 <a:ea typeface="Microsoft JhengHei" panose="020B0604030504040204" pitchFamily="34" charset="-120"/>
               </a:rPr>
-              <a:t> 1</a:t>
-            </a:r>
-            <a:r>
-              <a:rPr lang="en-US" sz="4400" b="1" dirty="0" smtClean="0">
-                <a:solidFill>
-                  <a:srgbClr val="000066"/>
-                </a:solidFill>
-                <a:effectLst/>
+              <a:t>1</a:t>
+            </a:r>
+            <a:r>
+              <a:rPr lang="en-US" sz="3600" b="1" dirty="0">
+                <a:solidFill>
+                  <a:srgbClr val="000066"/>
+                </a:solidFill>
                 <a:latin typeface="Microsoft JhengHei" panose="020B0604030504040204" pitchFamily="34" charset="-120"/>
                 <a:ea typeface="Microsoft JhengHei" panose="020B0604030504040204" pitchFamily="34" charset="-120"/>
               </a:rPr>
-              <a:t> </a:t>
-            </a:r>
-            <a:r>
-              <a:rPr lang="en-US" sz="4400" b="1" dirty="0">
-                <a:solidFill>
-                  <a:srgbClr val="000066"/>
-                </a:solidFill>
-                <a:effectLst/>
-                <a:latin typeface="Microsoft JhengHei" panose="020B0604030504040204" pitchFamily="34" charset="-120"/>
-                <a:ea typeface="Microsoft JhengHei" panose="020B0604030504040204" pitchFamily="34" charset="-120"/>
-              </a:rPr>
-              <a:t>)</a:t>
-            </a:r>
-            <a:endParaRPr lang="vi-VN" sz="4400" b="1" dirty="0">
+              <a:t> )</a:t>
+            </a:r>
+            <a:endParaRPr lang="vi-VN" sz="3600" b="1" dirty="0">
               <a:solidFill>
                 <a:srgbClr val="000066"/>
               </a:solidFill>
-              <a:effectLst/>
-              <a:latin typeface="Microsoft JhengHei" panose="020B0604030504040204" pitchFamily="34" charset="-120"/>
               <a:ea typeface="Microsoft JhengHei" panose="020B0604030504040204" pitchFamily="34" charset="-120"/>
             </a:endParaRPr>
           </a:p>
@@ -4704,8 +4599,8 @@
         </p:nvSpPr>
         <p:spPr>
           <a:xfrm>
-            <a:off x="0" y="5311662"/>
-            <a:ext cx="12192000" cy="769441"/>
+            <a:off x="0" y="5373217"/>
+            <a:ext cx="12192000" cy="646331"/>
           </a:xfrm>
           <a:prstGeom prst="rect">
             <a:avLst/>
@@ -4720,66 +4615,49 @@
           <a:p>
             <a:pPr algn="ctr"/>
             <a:r>
-              <a:rPr lang="en-US" sz="4400" b="1" dirty="0">
-                <a:solidFill>
-                  <a:srgbClr val="000066"/>
-                </a:solidFill>
-                <a:effectLst/>
+              <a:rPr lang="en-US" sz="3600" b="1" dirty="0">
+                <a:solidFill>
+                  <a:srgbClr val="000066"/>
+                </a:solidFill>
                 <a:latin typeface="Microsoft JhengHei" panose="020B0604030504040204" pitchFamily="34" charset="-120"/>
                 <a:ea typeface="Microsoft JhengHei" panose="020B0604030504040204" pitchFamily="34" charset="-120"/>
               </a:rPr>
               <a:t>( </a:t>
             </a:r>
             <a:r>
-              <a:rPr lang="zh-CN" altLang="en-US" sz="4400" b="1" dirty="0" smtClean="0">
-                <a:solidFill>
-                  <a:srgbClr val="000066"/>
-                </a:solidFill>
-                <a:effectLst/>
+              <a:rPr lang="zh-CN" altLang="en-US" sz="3600" b="1" dirty="0">
+                <a:solidFill>
+                  <a:srgbClr val="000066"/>
+                </a:solidFill>
                 <a:latin typeface="Microsoft JhengHei" panose="020B0604030504040204" pitchFamily="34" charset="-120"/>
                 <a:ea typeface="Microsoft JhengHei" panose="020B0604030504040204" pitchFamily="34" charset="-120"/>
               </a:rPr>
-              <a:t>副</a:t>
-            </a:r>
-            <a:r>
-              <a:rPr lang="en-US" altLang="zh-CN" sz="4400" b="1" dirty="0" smtClean="0">
-                <a:solidFill>
-                  <a:srgbClr val="000066"/>
-                </a:solidFill>
-                <a:effectLst/>
+              <a:t>副歌 </a:t>
+            </a:r>
+            <a:r>
+              <a:rPr lang="en-US" altLang="zh-CN" sz="3600" b="1" dirty="0">
+                <a:solidFill>
+                  <a:srgbClr val="000066"/>
+                </a:solidFill>
                 <a:latin typeface="Microsoft JhengHei" panose="020B0604030504040204" pitchFamily="34" charset="-120"/>
                 <a:ea typeface="Microsoft JhengHei" panose="020B0604030504040204" pitchFamily="34" charset="-120"/>
               </a:rPr>
-              <a:t> 1</a:t>
-            </a:r>
-            <a:r>
-              <a:rPr lang="en-US" sz="4400" b="1" dirty="0" smtClean="0">
-                <a:solidFill>
-                  <a:srgbClr val="000066"/>
-                </a:solidFill>
-                <a:effectLst/>
+              <a:t>1</a:t>
+            </a:r>
+            <a:r>
+              <a:rPr lang="en-US" sz="3600" b="1" dirty="0">
+                <a:solidFill>
+                  <a:srgbClr val="000066"/>
+                </a:solidFill>
                 <a:latin typeface="Microsoft JhengHei" panose="020B0604030504040204" pitchFamily="34" charset="-120"/>
                 <a:ea typeface="Microsoft JhengHei" panose="020B0604030504040204" pitchFamily="34" charset="-120"/>
               </a:rPr>
-              <a:t> </a:t>
-            </a:r>
-            <a:r>
-              <a:rPr lang="en-US" sz="4400" b="1" dirty="0">
-                <a:solidFill>
-                  <a:srgbClr val="000066"/>
-                </a:solidFill>
-                <a:effectLst/>
-                <a:latin typeface="Microsoft JhengHei" panose="020B0604030504040204" pitchFamily="34" charset="-120"/>
-                <a:ea typeface="Microsoft JhengHei" panose="020B0604030504040204" pitchFamily="34" charset="-120"/>
-              </a:rPr>
-              <a:t>)</a:t>
-            </a:r>
-            <a:endParaRPr lang="vi-VN" sz="4400" b="1" dirty="0">
+              <a:t> )</a:t>
+            </a:r>
+            <a:endParaRPr lang="vi-VN" sz="3600" b="1" dirty="0">
               <a:solidFill>
                 <a:srgbClr val="000066"/>
               </a:solidFill>
-              <a:effectLst/>
-              <a:latin typeface="Microsoft JhengHei" panose="020B0604030504040204" pitchFamily="34" charset="-120"/>
               <a:ea typeface="Microsoft JhengHei" panose="020B0604030504040204" pitchFamily="34" charset="-120"/>
             </a:endParaRPr>
           </a:p>
@@ -4858,7 +4736,7 @@
                 <a:latin typeface="微軟正黑體" pitchFamily="34" charset="-120"/>
                 <a:ea typeface="微軟正黑體" pitchFamily="34" charset="-120"/>
               </a:rPr>
-              <a:t>袮</a:t>
+              <a:t>祢</a:t>
             </a:r>
             <a:r>
               <a:rPr lang="zh-TW" altLang="en-US" sz="6400" b="1" dirty="0">
@@ -4910,8 +4788,8 @@
         </p:nvSpPr>
         <p:spPr>
           <a:xfrm>
-            <a:off x="0" y="5311662"/>
-            <a:ext cx="12192000" cy="769441"/>
+            <a:off x="0" y="5373217"/>
+            <a:ext cx="12192000" cy="646331"/>
           </a:xfrm>
           <a:prstGeom prst="rect">
             <a:avLst/>
@@ -4926,66 +4804,49 @@
           <a:p>
             <a:pPr algn="ctr"/>
             <a:r>
-              <a:rPr lang="en-US" sz="4400" b="1" dirty="0">
-                <a:solidFill>
-                  <a:srgbClr val="000066"/>
-                </a:solidFill>
-                <a:effectLst/>
+              <a:rPr lang="en-US" sz="3600" b="1" dirty="0">
+                <a:solidFill>
+                  <a:srgbClr val="000066"/>
+                </a:solidFill>
                 <a:latin typeface="Microsoft JhengHei" panose="020B0604030504040204" pitchFamily="34" charset="-120"/>
                 <a:ea typeface="Microsoft JhengHei" panose="020B0604030504040204" pitchFamily="34" charset="-120"/>
               </a:rPr>
               <a:t>( </a:t>
             </a:r>
             <a:r>
-              <a:rPr lang="zh-CN" altLang="en-US" sz="4400" b="1" dirty="0" smtClean="0">
-                <a:solidFill>
-                  <a:srgbClr val="000066"/>
-                </a:solidFill>
-                <a:effectLst/>
+              <a:rPr lang="zh-CN" altLang="en-US" sz="3600" b="1" dirty="0">
+                <a:solidFill>
+                  <a:srgbClr val="000066"/>
+                </a:solidFill>
                 <a:latin typeface="Microsoft JhengHei" panose="020B0604030504040204" pitchFamily="34" charset="-120"/>
                 <a:ea typeface="Microsoft JhengHei" panose="020B0604030504040204" pitchFamily="34" charset="-120"/>
               </a:rPr>
-              <a:t>副</a:t>
-            </a:r>
-            <a:r>
-              <a:rPr lang="en-US" altLang="zh-CN" sz="4400" b="1" dirty="0" smtClean="0">
-                <a:solidFill>
-                  <a:srgbClr val="000066"/>
-                </a:solidFill>
-                <a:effectLst/>
+              <a:t>副歌 </a:t>
+            </a:r>
+            <a:r>
+              <a:rPr lang="en-US" altLang="zh-CN" sz="3600" b="1" dirty="0">
+                <a:solidFill>
+                  <a:srgbClr val="000066"/>
+                </a:solidFill>
                 <a:latin typeface="Microsoft JhengHei" panose="020B0604030504040204" pitchFamily="34" charset="-120"/>
                 <a:ea typeface="Microsoft JhengHei" panose="020B0604030504040204" pitchFamily="34" charset="-120"/>
               </a:rPr>
-              <a:t> 2</a:t>
-            </a:r>
-            <a:r>
-              <a:rPr lang="en-US" sz="4400" b="1" dirty="0" smtClean="0">
-                <a:solidFill>
-                  <a:srgbClr val="000066"/>
-                </a:solidFill>
-                <a:effectLst/>
+              <a:t>2</a:t>
+            </a:r>
+            <a:r>
+              <a:rPr lang="en-US" sz="3600" b="1" dirty="0">
+                <a:solidFill>
+                  <a:srgbClr val="000066"/>
+                </a:solidFill>
                 <a:latin typeface="Microsoft JhengHei" panose="020B0604030504040204" pitchFamily="34" charset="-120"/>
                 <a:ea typeface="Microsoft JhengHei" panose="020B0604030504040204" pitchFamily="34" charset="-120"/>
               </a:rPr>
-              <a:t> </a:t>
-            </a:r>
-            <a:r>
-              <a:rPr lang="en-US" sz="4400" b="1" dirty="0">
-                <a:solidFill>
-                  <a:srgbClr val="000066"/>
-                </a:solidFill>
-                <a:effectLst/>
-                <a:latin typeface="Microsoft JhengHei" panose="020B0604030504040204" pitchFamily="34" charset="-120"/>
-                <a:ea typeface="Microsoft JhengHei" panose="020B0604030504040204" pitchFamily="34" charset="-120"/>
-              </a:rPr>
-              <a:t>)</a:t>
-            </a:r>
-            <a:endParaRPr lang="vi-VN" sz="4400" b="1" dirty="0">
+              <a:t> )</a:t>
+            </a:r>
+            <a:endParaRPr lang="vi-VN" sz="3600" b="1" dirty="0">
               <a:solidFill>
                 <a:srgbClr val="000066"/>
               </a:solidFill>
-              <a:effectLst/>
-              <a:latin typeface="Microsoft JhengHei" panose="020B0604030504040204" pitchFamily="34" charset="-120"/>
               <a:ea typeface="Microsoft JhengHei" panose="020B0604030504040204" pitchFamily="34" charset="-120"/>
             </a:endParaRPr>
           </a:p>
